--- a/ゲーム科1年/00_前期/ゲームプログラミングⅢ/ゲーム数学/実習/05_ベクトルの導入.pptx
+++ b/ゲーム科1年/00_前期/ゲームプログラミングⅢ/ゲーム数学/実習/05_ベクトルの導入.pptx
@@ -267,7 +267,7 @@
           <a:p>
             <a:fld id="{E9CC885B-4903-4D54-9A93-00025F12DED9}" type="datetimeFigureOut">
               <a:rPr kumimoji="1" lang="ja-JP" altLang="en-US" smtClean="0"/>
-              <a:t>2024/11/6</a:t>
+              <a:t>2025/1/6</a:t>
             </a:fld>
             <a:endParaRPr kumimoji="1" lang="ja-JP" altLang="en-US"/>
           </a:p>
@@ -497,7 +497,7 @@
           <a:p>
             <a:fld id="{E9CC885B-4903-4D54-9A93-00025F12DED9}" type="datetimeFigureOut">
               <a:rPr kumimoji="1" lang="ja-JP" altLang="en-US" smtClean="0"/>
-              <a:t>2024/11/6</a:t>
+              <a:t>2025/1/6</a:t>
             </a:fld>
             <a:endParaRPr kumimoji="1" lang="ja-JP" altLang="en-US"/>
           </a:p>
@@ -737,7 +737,7 @@
           <a:p>
             <a:fld id="{E9CC885B-4903-4D54-9A93-00025F12DED9}" type="datetimeFigureOut">
               <a:rPr kumimoji="1" lang="ja-JP" altLang="en-US" smtClean="0"/>
-              <a:t>2024/11/6</a:t>
+              <a:t>2025/1/6</a:t>
             </a:fld>
             <a:endParaRPr kumimoji="1" lang="ja-JP" altLang="en-US"/>
           </a:p>
@@ -967,7 +967,7 @@
           <a:p>
             <a:fld id="{E9CC885B-4903-4D54-9A93-00025F12DED9}" type="datetimeFigureOut">
               <a:rPr kumimoji="1" lang="ja-JP" altLang="en-US" smtClean="0"/>
-              <a:t>2024/11/6</a:t>
+              <a:t>2025/1/6</a:t>
             </a:fld>
             <a:endParaRPr kumimoji="1" lang="ja-JP" altLang="en-US"/>
           </a:p>
@@ -1242,7 +1242,7 @@
           <a:p>
             <a:fld id="{E9CC885B-4903-4D54-9A93-00025F12DED9}" type="datetimeFigureOut">
               <a:rPr kumimoji="1" lang="ja-JP" altLang="en-US" smtClean="0"/>
-              <a:t>2024/11/6</a:t>
+              <a:t>2025/1/6</a:t>
             </a:fld>
             <a:endParaRPr kumimoji="1" lang="ja-JP" altLang="en-US"/>
           </a:p>
@@ -1571,7 +1571,7 @@
           <a:p>
             <a:fld id="{E9CC885B-4903-4D54-9A93-00025F12DED9}" type="datetimeFigureOut">
               <a:rPr kumimoji="1" lang="ja-JP" altLang="en-US" smtClean="0"/>
-              <a:t>2024/11/6</a:t>
+              <a:t>2025/1/6</a:t>
             </a:fld>
             <a:endParaRPr kumimoji="1" lang="ja-JP" altLang="en-US"/>
           </a:p>
@@ -2047,7 +2047,7 @@
           <a:p>
             <a:fld id="{E9CC885B-4903-4D54-9A93-00025F12DED9}" type="datetimeFigureOut">
               <a:rPr kumimoji="1" lang="ja-JP" altLang="en-US" smtClean="0"/>
-              <a:t>2024/11/6</a:t>
+              <a:t>2025/1/6</a:t>
             </a:fld>
             <a:endParaRPr kumimoji="1" lang="ja-JP" altLang="en-US"/>
           </a:p>
@@ -2188,7 +2188,7 @@
           <a:p>
             <a:fld id="{E9CC885B-4903-4D54-9A93-00025F12DED9}" type="datetimeFigureOut">
               <a:rPr kumimoji="1" lang="ja-JP" altLang="en-US" smtClean="0"/>
-              <a:t>2024/11/6</a:t>
+              <a:t>2025/1/6</a:t>
             </a:fld>
             <a:endParaRPr kumimoji="1" lang="ja-JP" altLang="en-US"/>
           </a:p>
@@ -2301,7 +2301,7 @@
           <a:p>
             <a:fld id="{E9CC885B-4903-4D54-9A93-00025F12DED9}" type="datetimeFigureOut">
               <a:rPr kumimoji="1" lang="ja-JP" altLang="en-US" smtClean="0"/>
-              <a:t>2024/11/6</a:t>
+              <a:t>2025/1/6</a:t>
             </a:fld>
             <a:endParaRPr kumimoji="1" lang="ja-JP" altLang="en-US"/>
           </a:p>
@@ -2644,7 +2644,7 @@
           <a:p>
             <a:fld id="{E9CC885B-4903-4D54-9A93-00025F12DED9}" type="datetimeFigureOut">
               <a:rPr kumimoji="1" lang="ja-JP" altLang="en-US" smtClean="0"/>
-              <a:t>2024/11/6</a:t>
+              <a:t>2025/1/6</a:t>
             </a:fld>
             <a:endParaRPr kumimoji="1" lang="ja-JP" altLang="en-US"/>
           </a:p>
@@ -2932,7 +2932,7 @@
           <a:p>
             <a:fld id="{E9CC885B-4903-4D54-9A93-00025F12DED9}" type="datetimeFigureOut">
               <a:rPr kumimoji="1" lang="ja-JP" altLang="en-US" smtClean="0"/>
-              <a:t>2024/11/6</a:t>
+              <a:t>2025/1/6</a:t>
             </a:fld>
             <a:endParaRPr kumimoji="1" lang="ja-JP" altLang="en-US"/>
           </a:p>
@@ -3205,7 +3205,7 @@
           <a:p>
             <a:fld id="{E9CC885B-4903-4D54-9A93-00025F12DED9}" type="datetimeFigureOut">
               <a:rPr kumimoji="1" lang="ja-JP" altLang="en-US" smtClean="0"/>
-              <a:t>2024/11/6</a:t>
+              <a:t>2025/1/6</a:t>
             </a:fld>
             <a:endParaRPr kumimoji="1" lang="ja-JP" altLang="en-US"/>
           </a:p>
@@ -3892,8 +3892,8 @@
           </a:prstGeom>
         </p:spPr>
       </p:pic>
-      <mc:AlternateContent xmlns:mc="http://schemas.openxmlformats.org/markup-compatibility/2006">
-        <mc:Choice xmlns:a14="http://schemas.microsoft.com/office/drawing/2010/main" Requires="a14">
+      <mc:AlternateContent xmlns:mc="http://schemas.openxmlformats.org/markup-compatibility/2006" xmlns:a14="http://schemas.microsoft.com/office/drawing/2010/main">
+        <mc:Choice Requires="a14">
           <p:sp>
             <p:nvSpPr>
               <p:cNvPr id="7" name="テキスト ボックス 6">
@@ -3922,6 +3922,7 @@
               </a:bodyPr>
               <a:lstStyle/>
               <a:p>
+                <a:pPr/>
                 <a14:m>
                   <m:oMathPara xmlns:m="http://schemas.openxmlformats.org/officeDocument/2006/math">
                     <m:oMathParaPr>
@@ -3942,7 +3943,7 @@
             </p:txBody>
           </p:sp>
         </mc:Choice>
-        <mc:Fallback>
+        <mc:Fallback xmlns="">
           <p:sp>
             <p:nvSpPr>
               <p:cNvPr id="7" name="テキスト ボックス 6">
@@ -4525,7 +4526,19 @@
             </a:r>
             <a:r>
               <a:rPr kumimoji="1" lang="ja-JP" altLang="en-US" sz="2400" dirty="0"/>
-              <a:t>にはベクトル用の構造体が用意されています。</a:t>
+              <a:t>には</a:t>
+            </a:r>
+            <a:r>
+              <a:rPr kumimoji="1" lang="ja-JP" altLang="en-US" sz="2400" b="1" dirty="0">
+                <a:solidFill>
+                  <a:srgbClr val="FF0000"/>
+                </a:solidFill>
+              </a:rPr>
+              <a:t>ベクトル用の構造体</a:t>
+            </a:r>
+            <a:r>
+              <a:rPr kumimoji="1" lang="ja-JP" altLang="en-US" sz="2400" dirty="0"/>
+              <a:t>が用意されています。</a:t>
             </a:r>
             <a:endParaRPr kumimoji="1" lang="en-US" altLang="ja-JP" sz="2400" dirty="0"/>
           </a:p>
@@ -4576,7 +4589,7 @@
         <p:spPr>
           <a:xfrm>
             <a:off x="567542" y="3653863"/>
-            <a:ext cx="10644261" cy="830997"/>
+            <a:ext cx="10701969" cy="461665"/>
           </a:xfrm>
           <a:prstGeom prst="rect">
             <a:avLst/>
@@ -4588,29 +4601,6 @@
             <a:spAutoFit/>
           </a:bodyPr>
           <a:lstStyle/>
-          <a:p>
-            <a:r>
-              <a:rPr kumimoji="1" lang="en-US" altLang="ja-JP" sz="2400" dirty="0" err="1"/>
-              <a:t>DxLib</a:t>
-            </a:r>
-            <a:r>
-              <a:rPr kumimoji="1" lang="ja-JP" altLang="en-US" sz="2400" dirty="0"/>
-              <a:t>には</a:t>
-            </a:r>
-            <a:r>
-              <a:rPr kumimoji="1" lang="ja-JP" altLang="en-US" sz="2400" b="1" dirty="0">
-                <a:solidFill>
-                  <a:srgbClr val="FF0000"/>
-                </a:solidFill>
-              </a:rPr>
-              <a:t>ベクトル用の構造体</a:t>
-            </a:r>
-            <a:r>
-              <a:rPr kumimoji="1" lang="ja-JP" altLang="en-US" sz="2400" dirty="0"/>
-              <a:t>が用意されています。</a:t>
-            </a:r>
-            <a:endParaRPr kumimoji="1" lang="en-US" altLang="ja-JP" sz="2400" dirty="0"/>
-          </a:p>
           <a:p>
             <a:r>
               <a:rPr kumimoji="1" lang="ja-JP" altLang="en-US" sz="2400" dirty="0"/>
